--- a/03-build/pptx/C4_U10_alumno.pptx
+++ b/03-build/pptx/C4_U10_alumno.pptx
@@ -4254,7 +4254,6 @@
               <a:srgbClr val="E4E3DE"/>
             </a:solidFill>
           </a:ln>
-          <a:effectLst/>
           <a:effectLst>
             <a:outerShdw blurRad="90000" dist="38000" dir="5400000" rotWithShape="0">
               <a:srgbClr val="20242E">
@@ -5693,7 +5692,6 @@
               <a:srgbClr val="D64550"/>
             </a:solidFill>
           </a:ln>
-          <a:effectLst/>
           <a:effectLst>
             <a:outerShdw blurRad="90000" dist="38000" dir="5400000" rotWithShape="0">
               <a:srgbClr val="20242E">
@@ -5881,7 +5879,6 @@
               <a:srgbClr val="E4E3DE"/>
             </a:solidFill>
           </a:ln>
-          <a:effectLst/>
           <a:effectLst>
             <a:outerShdw blurRad="90000" dist="38000" dir="5400000" rotWithShape="0">
               <a:srgbClr val="20242E">
@@ -6628,7 +6625,6 @@
               <a:srgbClr val="E4E3DE"/>
             </a:solidFill>
           </a:ln>
-          <a:effectLst/>
           <a:effectLst>
             <a:outerShdw blurRad="90000" dist="38000" dir="5400000" rotWithShape="0">
               <a:srgbClr val="20242E">
@@ -6772,7 +6768,6 @@
               <a:srgbClr val="E4E3DE"/>
             </a:solidFill>
           </a:ln>
-          <a:effectLst/>
           <a:effectLst>
             <a:outerShdw blurRad="90000" dist="38000" dir="5400000" rotWithShape="0">
               <a:srgbClr val="20242E">
@@ -6916,7 +6911,6 @@
               <a:srgbClr val="E4E3DE"/>
             </a:solidFill>
           </a:ln>
-          <a:effectLst/>
           <a:effectLst>
             <a:outerShdw blurRad="90000" dist="38000" dir="5400000" rotWithShape="0">
               <a:srgbClr val="20242E">
@@ -7060,7 +7054,6 @@
               <a:srgbClr val="E4E3DE"/>
             </a:solidFill>
           </a:ln>
-          <a:effectLst/>
           <a:effectLst>
             <a:outerShdw blurRad="90000" dist="38000" dir="5400000" rotWithShape="0">
               <a:srgbClr val="20242E">
@@ -7204,7 +7197,6 @@
               <a:srgbClr val="E4E3DE"/>
             </a:solidFill>
           </a:ln>
-          <a:effectLst/>
           <a:effectLst>
             <a:outerShdw blurRad="90000" dist="38000" dir="5400000" rotWithShape="0">
               <a:srgbClr val="20242E">
@@ -7348,7 +7340,6 @@
               <a:srgbClr val="E4E3DE"/>
             </a:solidFill>
           </a:ln>
-          <a:effectLst/>
           <a:effectLst>
             <a:outerShdw blurRad="90000" dist="38000" dir="5400000" rotWithShape="0">
               <a:srgbClr val="20242E">
@@ -7492,7 +7483,6 @@
               <a:srgbClr val="D64550"/>
             </a:solidFill>
           </a:ln>
-          <a:effectLst/>
           <a:effectLst>
             <a:outerShdw blurRad="90000" dist="38000" dir="5400000" rotWithShape="0">
               <a:srgbClr val="20242E">
@@ -8187,7 +8177,6 @@
               <a:srgbClr val="D64550"/>
             </a:solidFill>
           </a:ln>
-          <a:effectLst/>
           <a:effectLst>
             <a:outerShdw blurRad="90000" dist="38000" dir="5400000" rotWithShape="0">
               <a:srgbClr val="20242E">
@@ -9447,7 +9436,6 @@
               <a:srgbClr val="D64550"/>
             </a:solidFill>
           </a:ln>
-          <a:effectLst/>
           <a:effectLst>
             <a:outerShdw blurRad="90000" dist="38000" dir="5400000" rotWithShape="0">
               <a:srgbClr val="20242E">
@@ -9689,7 +9677,6 @@
               <a:srgbClr val="E4E3DE"/>
             </a:solidFill>
           </a:ln>
-          <a:effectLst/>
           <a:effectLst>
             <a:outerShdw blurRad="90000" dist="38000" dir="5400000" rotWithShape="0">
               <a:srgbClr val="20242E">
@@ -10392,7 +10379,6 @@
               <a:srgbClr val="E4E3DE"/>
             </a:solidFill>
           </a:ln>
-          <a:effectLst/>
           <a:effectLst>
             <a:outerShdw blurRad="90000" dist="38000" dir="5400000" rotWithShape="0">
               <a:srgbClr val="20242E">
@@ -10546,7 +10532,6 @@
               <a:srgbClr val="E4E3DE"/>
             </a:solidFill>
           </a:ln>
-          <a:effectLst/>
           <a:effectLst>
             <a:outerShdw blurRad="90000" dist="38000" dir="5400000" rotWithShape="0">
               <a:srgbClr val="20242E">
@@ -10700,7 +10685,6 @@
               <a:srgbClr val="E4E3DE"/>
             </a:solidFill>
           </a:ln>
-          <a:effectLst/>
           <a:effectLst>
             <a:outerShdw blurRad="90000" dist="38000" dir="5400000" rotWithShape="0">
               <a:srgbClr val="20242E">
@@ -10854,7 +10838,6 @@
               <a:srgbClr val="E4E3DE"/>
             </a:solidFill>
           </a:ln>
-          <a:effectLst/>
           <a:effectLst>
             <a:outerShdw blurRad="90000" dist="38000" dir="5400000" rotWithShape="0">
               <a:srgbClr val="20242E">
@@ -11008,7 +10991,6 @@
               <a:srgbClr val="E4E3DE"/>
             </a:solidFill>
           </a:ln>
-          <a:effectLst/>
           <a:effectLst>
             <a:outerShdw blurRad="90000" dist="38000" dir="5400000" rotWithShape="0">
               <a:srgbClr val="20242E">
@@ -11162,7 +11144,6 @@
               <a:srgbClr val="E4E3DE"/>
             </a:solidFill>
           </a:ln>
-          <a:effectLst/>
           <a:effectLst>
             <a:outerShdw blurRad="90000" dist="38000" dir="5400000" rotWithShape="0">
               <a:srgbClr val="20242E">
@@ -11316,7 +11297,6 @@
               <a:srgbClr val="E4E3DE"/>
             </a:solidFill>
           </a:ln>
-          <a:effectLst/>
           <a:effectLst>
             <a:outerShdw blurRad="90000" dist="38000" dir="5400000" rotWithShape="0">
               <a:srgbClr val="20242E">
@@ -11470,7 +11450,6 @@
               <a:srgbClr val="E4E3DE"/>
             </a:solidFill>
           </a:ln>
-          <a:effectLst/>
           <a:effectLst>
             <a:outerShdw blurRad="90000" dist="38000" dir="5400000" rotWithShape="0">
               <a:srgbClr val="20242E">
@@ -11624,7 +11603,6 @@
               <a:srgbClr val="E4E3DE"/>
             </a:solidFill>
           </a:ln>
-          <a:effectLst/>
           <a:effectLst>
             <a:outerShdw blurRad="90000" dist="38000" dir="5400000" rotWithShape="0">
               <a:srgbClr val="20242E">
@@ -11778,7 +11756,6 @@
               <a:srgbClr val="E4E3DE"/>
             </a:solidFill>
           </a:ln>
-          <a:effectLst/>
           <a:effectLst>
             <a:outerShdw blurRad="90000" dist="38000" dir="5400000" rotWithShape="0">
               <a:srgbClr val="20242E">
@@ -11932,7 +11909,6 @@
               <a:srgbClr val="E4E3DE"/>
             </a:solidFill>
           </a:ln>
-          <a:effectLst/>
           <a:effectLst>
             <a:outerShdw blurRad="90000" dist="38000" dir="5400000" rotWithShape="0">
               <a:srgbClr val="20242E">
@@ -12086,7 +12062,6 @@
               <a:srgbClr val="E4E3DE"/>
             </a:solidFill>
           </a:ln>
-          <a:effectLst/>
           <a:effectLst>
             <a:outerShdw blurRad="90000" dist="38000" dir="5400000" rotWithShape="0">
               <a:srgbClr val="20242E">
@@ -12240,7 +12215,6 @@
               <a:srgbClr val="E4E3DE"/>
             </a:solidFill>
           </a:ln>
-          <a:effectLst/>
           <a:effectLst>
             <a:outerShdw blurRad="90000" dist="38000" dir="5400000" rotWithShape="0">
               <a:srgbClr val="20242E">
@@ -12394,7 +12368,6 @@
               <a:srgbClr val="E4E3DE"/>
             </a:solidFill>
           </a:ln>
-          <a:effectLst/>
           <a:effectLst>
             <a:outerShdw blurRad="90000" dist="38000" dir="5400000" rotWithShape="0">
               <a:srgbClr val="20242E">
@@ -12548,7 +12521,6 @@
               <a:srgbClr val="E4E3DE"/>
             </a:solidFill>
           </a:ln>
-          <a:effectLst/>
           <a:effectLst>
             <a:outerShdw blurRad="90000" dist="38000" dir="5400000" rotWithShape="0">
               <a:srgbClr val="20242E">
@@ -12702,7 +12674,6 @@
               <a:srgbClr val="E4E3DE"/>
             </a:solidFill>
           </a:ln>
-          <a:effectLst/>
           <a:effectLst>
             <a:outerShdw blurRad="90000" dist="38000" dir="5400000" rotWithShape="0">
               <a:srgbClr val="20242E">
@@ -12856,7 +12827,6 @@
               <a:srgbClr val="E4E3DE"/>
             </a:solidFill>
           </a:ln>
-          <a:effectLst/>
           <a:effectLst>
             <a:outerShdw blurRad="90000" dist="38000" dir="5400000" rotWithShape="0">
               <a:srgbClr val="20242E">
@@ -13010,7 +12980,6 @@
               <a:srgbClr val="E4E3DE"/>
             </a:solidFill>
           </a:ln>
-          <a:effectLst/>
           <a:effectLst>
             <a:outerShdw blurRad="90000" dist="38000" dir="5400000" rotWithShape="0">
               <a:srgbClr val="20242E">
@@ -13164,7 +13133,6 @@
               <a:srgbClr val="E4E3DE"/>
             </a:solidFill>
           </a:ln>
-          <a:effectLst/>
           <a:effectLst>
             <a:outerShdw blurRad="90000" dist="38000" dir="5400000" rotWithShape="0">
               <a:srgbClr val="20242E">
@@ -13318,7 +13286,6 @@
               <a:srgbClr val="D64550"/>
             </a:solidFill>
           </a:ln>
-          <a:effectLst/>
           <a:effectLst>
             <a:outerShdw blurRad="90000" dist="38000" dir="5400000" rotWithShape="0">
               <a:srgbClr val="20242E">
@@ -13472,7 +13439,6 @@
               <a:srgbClr val="D64550"/>
             </a:solidFill>
           </a:ln>
-          <a:effectLst/>
           <a:effectLst>
             <a:outerShdw blurRad="90000" dist="38000" dir="5400000" rotWithShape="0">
               <a:srgbClr val="20242E">
@@ -13626,7 +13592,6 @@
               <a:srgbClr val="D64550"/>
             </a:solidFill>
           </a:ln>
-          <a:effectLst/>
           <a:effectLst>
             <a:outerShdw blurRad="90000" dist="38000" dir="5400000" rotWithShape="0">
               <a:srgbClr val="20242E">
@@ -14263,7 +14228,6 @@
               <a:srgbClr val="E4E3DE"/>
             </a:solidFill>
           </a:ln>
-          <a:effectLst/>
           <a:effectLst>
             <a:outerShdw blurRad="90000" dist="38000" dir="5400000" rotWithShape="0">
               <a:srgbClr val="20242E">
@@ -14561,7 +14525,6 @@
               <a:srgbClr val="DC2626"/>
             </a:solidFill>
           </a:ln>
-          <a:effectLst/>
           <a:effectLst>
             <a:outerShdw blurRad="90000" dist="38000" dir="5400000" rotWithShape="0">
               <a:srgbClr val="20242E">
@@ -14764,7 +14727,6 @@
               <a:srgbClr val="D64550"/>
             </a:solidFill>
           </a:ln>
-          <a:effectLst/>
           <a:effectLst>
             <a:outerShdw blurRad="90000" dist="38000" dir="5400000" rotWithShape="0">
               <a:srgbClr val="20242E">
@@ -15740,7 +15702,6 @@
               <a:srgbClr val="E4E3DE"/>
             </a:solidFill>
           </a:ln>
-          <a:effectLst/>
           <a:effectLst>
             <a:outerShdw blurRad="90000" dist="38000" dir="5400000" rotWithShape="0">
               <a:srgbClr val="20242E">
@@ -15909,7 +15870,6 @@
               <a:srgbClr val="E4E3DE"/>
             </a:solidFill>
           </a:ln>
-          <a:effectLst/>
           <a:effectLst>
             <a:outerShdw blurRad="90000" dist="38000" dir="5400000" rotWithShape="0">
               <a:srgbClr val="20242E">
@@ -16078,7 +16038,6 @@
               <a:srgbClr val="E4E3DE"/>
             </a:solidFill>
           </a:ln>
-          <a:effectLst/>
           <a:effectLst>
             <a:outerShdw blurRad="90000" dist="38000" dir="5400000" rotWithShape="0">
               <a:srgbClr val="20242E">
@@ -16247,7 +16206,6 @@
               <a:srgbClr val="E4E3DE"/>
             </a:solidFill>
           </a:ln>
-          <a:effectLst/>
           <a:effectLst>
             <a:outerShdw blurRad="90000" dist="38000" dir="5400000" rotWithShape="0">
               <a:srgbClr val="20242E">
@@ -16416,7 +16374,6 @@
               <a:srgbClr val="E4E3DE"/>
             </a:solidFill>
           </a:ln>
-          <a:effectLst/>
           <a:effectLst>
             <a:outerShdw blurRad="90000" dist="38000" dir="5400000" rotWithShape="0">
               <a:srgbClr val="20242E">
@@ -16585,7 +16542,6 @@
               <a:srgbClr val="E4E3DE"/>
             </a:solidFill>
           </a:ln>
-          <a:effectLst/>
           <a:effectLst>
             <a:outerShdw blurRad="90000" dist="38000" dir="5400000" rotWithShape="0">
               <a:srgbClr val="20242E">
@@ -16754,7 +16710,6 @@
               <a:srgbClr val="E4E3DE"/>
             </a:solidFill>
           </a:ln>
-          <a:effectLst/>
           <a:effectLst>
             <a:outerShdw blurRad="90000" dist="38000" dir="5400000" rotWithShape="0">
               <a:srgbClr val="20242E">
@@ -16923,7 +16878,6 @@
               <a:srgbClr val="E4E3DE"/>
             </a:solidFill>
           </a:ln>
-          <a:effectLst/>
           <a:effectLst>
             <a:outerShdw blurRad="90000" dist="38000" dir="5400000" rotWithShape="0">
               <a:srgbClr val="20242E">
@@ -17092,7 +17046,6 @@
               <a:srgbClr val="E4E3DE"/>
             </a:solidFill>
           </a:ln>
-          <a:effectLst/>
           <a:effectLst>
             <a:outerShdw blurRad="90000" dist="38000" dir="5400000" rotWithShape="0">
               <a:srgbClr val="20242E">
@@ -17261,7 +17214,6 @@
               <a:srgbClr val="E4E3DE"/>
             </a:solidFill>
           </a:ln>
-          <a:effectLst/>
           <a:effectLst>
             <a:outerShdw blurRad="90000" dist="38000" dir="5400000" rotWithShape="0">
               <a:srgbClr val="20242E">
@@ -18010,7 +17962,6 @@
               <a:srgbClr val="E4E3DE"/>
             </a:solidFill>
           </a:ln>
-          <a:effectLst/>
           <a:effectLst>
             <a:outerShdw blurRad="90000" dist="38000" dir="5400000" rotWithShape="0">
               <a:srgbClr val="20242E">
@@ -20065,7 +20016,6 @@
               <a:srgbClr val="D64550"/>
             </a:solidFill>
           </a:ln>
-          <a:effectLst/>
           <a:effectLst>
             <a:outerShdw blurRad="90000" dist="38000" dir="5400000" rotWithShape="0">
               <a:srgbClr val="20242E">
@@ -20893,7 +20843,6 @@
               <a:srgbClr val="E4E3DE"/>
             </a:solidFill>
           </a:ln>
-          <a:effectLst/>
           <a:effectLst>
             <a:outerShdw blurRad="90000" dist="38000" dir="5400000" rotWithShape="0">
               <a:srgbClr val="20242E">
@@ -21203,7 +21152,6 @@
               <a:srgbClr val="E4E3DE"/>
             </a:solidFill>
           </a:ln>
-          <a:effectLst/>
           <a:effectLst>
             <a:outerShdw blurRad="90000" dist="38000" dir="5400000" rotWithShape="0">
               <a:srgbClr val="20242E">
@@ -21495,7 +21443,6 @@
               <a:srgbClr val="D64550"/>
             </a:solidFill>
           </a:ln>
-          <a:effectLst/>
           <a:effectLst>
             <a:outerShdw blurRad="90000" dist="38000" dir="5400000" rotWithShape="0">
               <a:srgbClr val="20242E">
@@ -23357,7 +23304,6 @@
               <a:srgbClr val="A8323B"/>
             </a:solidFill>
           </a:ln>
-          <a:effectLst/>
           <a:effectLst>
             <a:outerShdw blurRad="90000" dist="38000" dir="5400000" rotWithShape="0">
               <a:srgbClr val="20242E">
@@ -23841,7 +23787,6 @@
               <a:srgbClr val="A8323B"/>
             </a:solidFill>
           </a:ln>
-          <a:effectLst/>
           <a:effectLst>
             <a:outerShdw blurRad="90000" dist="38000" dir="5400000" rotWithShape="0">
               <a:srgbClr val="20242E">
@@ -24325,7 +24270,6 @@
               <a:srgbClr val="A8323B"/>
             </a:solidFill>
           </a:ln>
-          <a:effectLst/>
           <a:effectLst>
             <a:outerShdw blurRad="90000" dist="38000" dir="5400000" rotWithShape="0">
               <a:srgbClr val="20242E">
@@ -24421,7 +24365,6 @@
               <a:srgbClr val="D64550"/>
             </a:solidFill>
           </a:ln>
-          <a:effectLst/>
           <a:effectLst>
             <a:outerShdw blurRad="90000" dist="38000" dir="5400000" rotWithShape="0">
               <a:srgbClr val="20242E">
@@ -25877,7 +25820,6 @@
               <a:srgbClr val="E4E3DE"/>
             </a:solidFill>
           </a:ln>
-          <a:effectLst/>
           <a:effectLst>
             <a:outerShdw blurRad="90000" dist="38000" dir="5400000" rotWithShape="0">
               <a:srgbClr val="20242E">
@@ -26301,7 +26243,6 @@
               <a:srgbClr val="E4E3DE"/>
             </a:solidFill>
           </a:ln>
-          <a:effectLst/>
           <a:effectLst>
             <a:outerShdw blurRad="90000" dist="38000" dir="5400000" rotWithShape="0">
               <a:srgbClr val="20242E">
@@ -26725,7 +26666,6 @@
               <a:srgbClr val="E4E3DE"/>
             </a:solidFill>
           </a:ln>
-          <a:effectLst/>
           <a:effectLst>
             <a:outerShdw blurRad="90000" dist="38000" dir="5400000" rotWithShape="0">
               <a:srgbClr val="20242E">
@@ -27677,7 +27617,6 @@
               <a:srgbClr val="D64550"/>
             </a:solidFill>
           </a:ln>
-          <a:effectLst/>
           <a:effectLst>
             <a:outerShdw blurRad="90000" dist="38000" dir="5400000" rotWithShape="0">
               <a:srgbClr val="20242E">
@@ -28047,7 +27986,6 @@
               <a:srgbClr val="E4E3DE"/>
             </a:solidFill>
           </a:ln>
-          <a:effectLst/>
           <a:effectLst>
             <a:outerShdw blurRad="90000" dist="38000" dir="5400000" rotWithShape="0">
               <a:srgbClr val="20242E">
@@ -29499,7 +29437,6 @@
               <a:srgbClr val="E4E3DE"/>
             </a:solidFill>
           </a:ln>
-          <a:effectLst/>
           <a:effectLst>
             <a:outerShdw blurRad="90000" dist="38000" dir="5400000" rotWithShape="0">
               <a:srgbClr val="20242E">
@@ -30401,7 +30338,6 @@
               <a:srgbClr val="D64550"/>
             </a:solidFill>
           </a:ln>
-          <a:effectLst/>
           <a:effectLst>
             <a:outerShdw blurRad="90000" dist="38000" dir="5400000" rotWithShape="0">
               <a:srgbClr val="20242E">
@@ -31333,7 +31269,6 @@
               <a:srgbClr val="E4E3DE"/>
             </a:solidFill>
           </a:ln>
-          <a:effectLst/>
           <a:effectLst>
             <a:outerShdw blurRad="90000" dist="38000" dir="5400000" rotWithShape="0">
               <a:srgbClr val="20242E">
@@ -31685,7 +31620,6 @@
               <a:srgbClr val="E4E3DE"/>
             </a:solidFill>
           </a:ln>
-          <a:effectLst/>
           <a:effectLst>
             <a:outerShdw blurRad="90000" dist="38000" dir="5400000" rotWithShape="0">
               <a:srgbClr val="20242E">
@@ -32055,7 +31989,6 @@
               <a:srgbClr val="DC2626"/>
             </a:solidFill>
           </a:ln>
-          <a:effectLst/>
           <a:effectLst>
             <a:outerShdw blurRad="90000" dist="38000" dir="5400000" rotWithShape="0">
               <a:srgbClr val="20242E">
@@ -32259,7 +32192,6 @@
               <a:srgbClr val="DC2626"/>
             </a:solidFill>
           </a:ln>
-          <a:effectLst/>
           <a:effectLst>
             <a:outerShdw blurRad="90000" dist="38000" dir="5400000" rotWithShape="0">
               <a:srgbClr val="20242E">
@@ -32544,7 +32476,6 @@
               <a:srgbClr val="D64550"/>
             </a:solidFill>
           </a:ln>
-          <a:effectLst/>
           <a:effectLst>
             <a:outerShdw blurRad="90000" dist="38000" dir="5400000" rotWithShape="0">
               <a:srgbClr val="20242E">
